--- a/L08_script/slide_complete.pptx
+++ b/L08_script/slide_complete.pptx
@@ -16,9 +16,10 @@
     <p:sldId id="264" r:id="rId10"/>
     <p:sldId id="265" r:id="rId11"/>
     <p:sldId id="266" r:id="rId12"/>
+    <p:sldId id="267" r:id="rId13"/>
   </p:sldIdLst>
   <p:notesMasterIdLst>
-    <p:notesMasterId r:id="rId13"/>
+    <p:notesMasterId r:id="rId14"/>
   </p:notesMasterIdLst>
   <p:sldSz cx="12192000" cy="6858000"/>
   <p:notesSz cx="6858000" cy="12192000"/>
@@ -117,13 +118,13 @@
   <p:extLst>
     <p:ext uri="{521415D9-36F7-43E2-AB2F-B90AF26B5E84}">
       <p14:sectionLst xmlns:p14="http://schemas.microsoft.com/office/powerpoint/2010/main">
-        <p14:section name="Apertura" id="{921509bd-ce5e-da65-c6d0-6abcd24ce26f}">
+        <p14:section name="Apertura" id="{a700acd9-8911-7b66-4314-38ab460d94a1}">
           <p14:sldIdLst>
             <p14:sldId id="256"/>
             <p14:sldId id="257"/>
           </p14:sldIdLst>
         </p14:section>
-        <p14:section name="Spiegazione" id="{189d0b99-3a31-44ee-538d-88f6777e3326}">
+        <p14:section name="Spiegazione" id="{485b93d6-95c7-66e7-a758-7d9e2d576ef8}">
           <p14:sldIdLst>
             <p14:sldId id="258"/>
             <p14:sldId id="259"/>
@@ -131,21 +132,26 @@
             <p14:sldId id="261"/>
           </p14:sldIdLst>
         </p14:section>
-        <p14:section name="Task" id="{feb53528-46c6-6a96-b8f0-11b81406ceea}">
+        <p14:section name="Task" id="{4ee27dd8-b734-fec4-a4d0-38f16c89621d}">
           <p14:sldIdLst>
             <p14:sldId id="262"/>
           </p14:sldIdLst>
         </p14:section>
-        <p14:section name="Debrief" id="{9d0dedaa-70e7-b9b4-9cef-20df8770266e}">
+        <p14:section name="Debrief" id="{295de82f-7b75-ddf9-822a-ff93afc37098}">
           <p14:sldIdLst>
             <p14:sldId id="263"/>
             <p14:sldId id="264"/>
             <p14:sldId id="265"/>
           </p14:sldIdLst>
         </p14:section>
-        <p14:section name="Chiusura" id="{0d2584b9-3952-45e3-1d73-5e5b02ed743c}">
+        <p14:section name="Mini-progetto" id="{6b208c25-5492-3b18-f888-61b6e399e0cd}">
           <p14:sldIdLst>
             <p14:sldId id="266"/>
+          </p14:sldIdLst>
+        </p14:section>
+        <p14:section name="Chiusura" id="{3b721a28-28e4-239e-c12e-c52042b1c0c5}">
+          <p14:sldIdLst>
+            <p14:sldId id="267"/>
           </p14:sldIdLst>
         </p14:section>
       </p14:sectionLst>
@@ -728,7 +734,7 @@
           <a:p>
             <a:r>
               <a:rPr lang="en-US" dirty="0"/>
-              <a:t/>
+              <a:t>Se i temi sono arrivati prima della lezione, durante il task passa nelle stanze a dire a ogni gruppo se la domanda è fattibile. Chi non l'ha mandato lo manda entro due giorni.</a:t>
             </a:r>
             <a:endParaRPr lang="en-US" dirty="0"/>
           </a:p>
@@ -752,6 +758,94 @@
             <a:fld id="{F7021451-1387-4CA6-816F-3879F97B5CBC}" type="slidenum">
               <a:rPr lang="en-US"/>
               <a:t>11</a:t>
+            </a:fld>
+            <a:endParaRPr lang="en-US"/>
+          </a:p>
+        </p:txBody>
+      </p:sp>
+    </p:spTree>
+    <p:extLst>
+      <p:ext uri="{BB962C8B-B14F-4D97-AF65-F5344CB8AC3E}">
+        <p14:creationId xmlns:p14="http://schemas.microsoft.com/office/powerpoint/2010/main" val="1024086991"/>
+      </p:ext>
+    </p:extLst>
+  </p:cSld>
+  <p:clrMapOvr>
+    <a:masterClrMapping/>
+  </p:clrMapOvr>
+</p:notes>
+</file>
+
+<file path=ppt/notesSlides/notesSlide12.xml><?xml version="1.0" encoding="utf-8"?>
+<p:notes xmlns:a="http://schemas.openxmlformats.org/drawingml/2006/main" xmlns:r="http://schemas.openxmlformats.org/officeDocument/2006/relationships" xmlns:p="http://schemas.openxmlformats.org/presentationml/2006/main">
+  <p:cSld>
+    <p:spTree>
+      <p:nvGrpSpPr>
+        <p:cNvPr id="1" name=""/>
+        <p:cNvGrpSpPr/>
+        <p:nvPr/>
+      </p:nvGrpSpPr>
+      <p:grpSpPr>
+        <a:xfrm>
+          <a:off x="0" y="0"/>
+          <a:ext cx="0" cy="0"/>
+          <a:chOff x="0" y="0"/>
+          <a:chExt cx="0" cy="0"/>
+        </a:xfrm>
+      </p:grpSpPr>
+      <p:sp>
+        <p:nvSpPr>
+          <p:cNvPr id="2" name="Slide Image Placeholder 1"/>
+          <p:cNvSpPr>
+            <a:spLocks noGrp="1" noRot="1" noChangeAspect="1"/>
+          </p:cNvSpPr>
+          <p:nvPr>
+            <p:ph type="sldImg"/>
+          </p:nvPr>
+        </p:nvSpPr>
+        <p:spPr/>
+      </p:sp>
+      <p:sp>
+        <p:nvSpPr>
+          <p:cNvPr id="3" name="Notes Placeholder 2"/>
+          <p:cNvSpPr>
+            <a:spLocks noGrp="1"/>
+          </p:cNvSpPr>
+          <p:nvPr>
+            <p:ph type="body" idx="1"/>
+          </p:nvPr>
+        </p:nvSpPr>
+        <p:spPr/>
+        <p:txBody>
+          <a:bodyPr/>
+          <a:lstStyle/>
+          <a:p>
+            <a:r>
+              <a:rPr lang="en-US" dirty="0"/>
+              <a:t/>
+            </a:r>
+            <a:endParaRPr lang="en-US" dirty="0"/>
+          </a:p>
+        </p:txBody>
+      </p:sp>
+      <p:sp>
+        <p:nvSpPr>
+          <p:cNvPr id="4" name="Slide Number Placeholder 3"/>
+          <p:cNvSpPr>
+            <a:spLocks noGrp="1"/>
+          </p:cNvSpPr>
+          <p:nvPr>
+            <p:ph type="sldNum" sz="quarter" idx="10"/>
+          </p:nvPr>
+        </p:nvSpPr>
+        <p:spPr/>
+        <p:txBody>
+          <a:bodyPr/>
+          <a:lstStyle/>
+          <a:p>
+            <a:fld id="{F7021451-1387-4CA6-816F-3879F97B5CBC}" type="slidenum">
+              <a:rPr lang="en-US"/>
+              <a:t>12</a:t>
             </a:fld>
             <a:endParaRPr lang="en-US"/>
           </a:p>
@@ -3001,6 +3095,702 @@
 <file path=ppt/slides/slide11.xml><?xml version="1.0" encoding="utf-8"?>
 <p:sld xmlns:a="http://schemas.openxmlformats.org/drawingml/2006/main" xmlns:r="http://schemas.openxmlformats.org/officeDocument/2006/relationships" xmlns:p="http://schemas.openxmlformats.org/presentationml/2006/main">
   <p:cSld name="Slide 11">
+    <p:spTree>
+      <p:nvGrpSpPr>
+        <p:cNvPr id="1" name=""/>
+        <p:cNvGrpSpPr/>
+        <p:nvPr/>
+      </p:nvGrpSpPr>
+      <p:grpSpPr>
+        <a:xfrm>
+          <a:off x="0" y="0"/>
+          <a:ext cx="0" cy="0"/>
+          <a:chOff x="0" y="0"/>
+          <a:chExt cx="0" cy="0"/>
+        </a:xfrm>
+      </p:grpSpPr>
+      <p:sp>
+        <p:nvSpPr>
+          <p:cNvPr id="2" name="Text 0"/>
+          <p:cNvSpPr/>
+          <p:nvPr>
+            <p:ph idx="100" type="title" hasCustomPrompt="1"/>
+          </p:nvPr>
+        </p:nvSpPr>
+        <p:spPr>
+          <a:xfrm>
+            <a:off x="548640" y="365760"/>
+            <a:ext cx="11064240" cy="822960"/>
+          </a:xfrm>
+          <a:prstGeom prst="rect">
+            <a:avLst/>
+          </a:prstGeom>
+          <a:noFill/>
+          <a:ln/>
+        </p:spPr>
+        <p:txBody>
+          <a:bodyPr wrap="square" lIns="0" tIns="0" rIns="0" bIns="0" rtlCol="0" anchor="ctr"/>
+          <a:lstStyle/>
+          <a:p>
+            <a:pPr algn="l" indent="0" marL="0">
+              <a:buNone/>
+            </a:pPr>
+            <a:r>
+              <a:rPr lang="en-US" sz="3600" b="1" dirty="0">
+                <a:solidFill>
+                  <a:srgbClr val="0F4C5C"/>
+                </a:solidFill>
+              </a:rPr>
+              <a:t>Il mini-progetto finale</a:t>
+            </a:r>
+            <a:endParaRPr lang="en-US" sz="3600" dirty="0"/>
+          </a:p>
+        </p:txBody>
+      </p:sp>
+      <p:sp>
+        <p:nvSpPr>
+          <p:cNvPr id="3" name="Shape 1"/>
+          <p:cNvSpPr/>
+          <p:nvPr/>
+        </p:nvSpPr>
+        <p:spPr>
+          <a:xfrm>
+            <a:off x="548640" y="1737360"/>
+            <a:ext cx="2560320" cy="2743200"/>
+          </a:xfrm>
+          <a:prstGeom prst="roundRect">
+            <a:avLst>
+              <a:gd name="adj" fmla="val 4286"/>
+            </a:avLst>
+          </a:prstGeom>
+          <a:solidFill>
+            <a:srgbClr val="EEF3F4"/>
+          </a:solidFill>
+          <a:ln/>
+        </p:spPr>
+      </p:sp>
+      <p:sp>
+        <p:nvSpPr>
+          <p:cNvPr id="4" name="Shape 2"/>
+          <p:cNvSpPr/>
+          <p:nvPr/>
+        </p:nvSpPr>
+        <p:spPr>
+          <a:xfrm>
+            <a:off x="822960" y="2011680"/>
+            <a:ext cx="914400" cy="914400"/>
+          </a:xfrm>
+          <a:prstGeom prst="ellipse">
+            <a:avLst/>
+          </a:prstGeom>
+          <a:solidFill>
+            <a:srgbClr val="FFFFFF"/>
+          </a:solidFill>
+          <a:ln/>
+        </p:spPr>
+      </p:sp>
+      <p:pic>
+        <p:nvPicPr>
+          <p:cNvPr id="5" name="Image 0" descr="preencoded.png">    </p:cNvPr>
+          <p:cNvPicPr>
+            <a:picLocks noChangeAspect="1"/>
+          </p:cNvPicPr>
+          <p:nvPr/>
+        </p:nvPicPr>
+        <p:blipFill>
+          <a:blip r:embed="rId1"/>
+          <a:stretch>
+            <a:fillRect/>
+          </a:stretch>
+        </p:blipFill>
+        <p:spPr>
+          <a:xfrm>
+            <a:off x="1069848" y="2258568"/>
+            <a:ext cx="420624" cy="420624"/>
+          </a:xfrm>
+          <a:prstGeom prst="rect">
+            <a:avLst/>
+          </a:prstGeom>
+        </p:spPr>
+      </p:pic>
+      <p:sp>
+        <p:nvSpPr>
+          <p:cNvPr id="6" name="Text 3"/>
+          <p:cNvSpPr txBox="1"/>
+          <p:nvPr/>
+        </p:nvSpPr>
+        <p:spPr>
+          <a:xfrm>
+            <a:off x="822960" y="3154680"/>
+            <a:ext cx="2011680" cy="502920"/>
+          </a:xfrm>
+          <a:prstGeom prst="rect">
+            <a:avLst/>
+          </a:prstGeom>
+          <a:noFill/>
+          <a:ln/>
+        </p:spPr>
+        <p:txBody>
+          <a:bodyPr wrap="square" lIns="0" tIns="0" rIns="0" bIns="0" rtlCol="0" anchor="ctr"/>
+          <a:lstStyle/>
+          <a:p>
+            <a:pPr indent="0" marL="0">
+              <a:buNone/>
+            </a:pPr>
+            <a:r>
+              <a:rPr lang="en-US" sz="2200" b="1" dirty="0">
+                <a:solidFill>
+                  <a:srgbClr val="1F2A30"/>
+                </a:solidFill>
+              </a:rPr>
+              <a:t>Una domanda</a:t>
+            </a:r>
+            <a:endParaRPr lang="en-US" sz="2200" dirty="0"/>
+          </a:p>
+        </p:txBody>
+      </p:sp>
+      <p:sp>
+        <p:nvSpPr>
+          <p:cNvPr id="7" name="Text 4"/>
+          <p:cNvSpPr txBox="1"/>
+          <p:nvPr/>
+        </p:nvSpPr>
+        <p:spPr>
+          <a:xfrm>
+            <a:off x="822960" y="3703320"/>
+            <a:ext cx="2011680" cy="594360"/>
+          </a:xfrm>
+          <a:prstGeom prst="rect">
+            <a:avLst/>
+          </a:prstGeom>
+          <a:noFill/>
+          <a:ln/>
+        </p:spPr>
+        <p:txBody>
+          <a:bodyPr wrap="square" lIns="0" tIns="0" rIns="0" bIns="0" rtlCol="0" anchor="t"/>
+          <a:lstStyle/>
+          <a:p>
+            <a:pPr indent="0" marL="0">
+              <a:buNone/>
+            </a:pPr>
+            <a:r>
+              <a:rPr lang="en-US" sz="1600" dirty="0">
+                <a:solidFill>
+                  <a:srgbClr val="5C6F7B"/>
+                </a:solidFill>
+              </a:rPr>
+              <a:t>piccola e precisa, con i dati che avete scelto</a:t>
+            </a:r>
+            <a:endParaRPr lang="en-US" sz="1600" dirty="0"/>
+          </a:p>
+        </p:txBody>
+      </p:sp>
+      <p:sp>
+        <p:nvSpPr>
+          <p:cNvPr id="8" name="Shape 5"/>
+          <p:cNvSpPr/>
+          <p:nvPr/>
+        </p:nvSpPr>
+        <p:spPr>
+          <a:xfrm>
+            <a:off x="3383280" y="1737360"/>
+            <a:ext cx="2560320" cy="2743200"/>
+          </a:xfrm>
+          <a:prstGeom prst="roundRect">
+            <a:avLst>
+              <a:gd name="adj" fmla="val 4286"/>
+            </a:avLst>
+          </a:prstGeom>
+          <a:solidFill>
+            <a:srgbClr val="EEF3F4"/>
+          </a:solidFill>
+          <a:ln/>
+        </p:spPr>
+      </p:sp>
+      <p:sp>
+        <p:nvSpPr>
+          <p:cNvPr id="9" name="Shape 6"/>
+          <p:cNvSpPr/>
+          <p:nvPr/>
+        </p:nvSpPr>
+        <p:spPr>
+          <a:xfrm>
+            <a:off x="3657600" y="2011680"/>
+            <a:ext cx="914400" cy="914400"/>
+          </a:xfrm>
+          <a:prstGeom prst="ellipse">
+            <a:avLst/>
+          </a:prstGeom>
+          <a:solidFill>
+            <a:srgbClr val="FFFFFF"/>
+          </a:solidFill>
+          <a:ln/>
+        </p:spPr>
+      </p:sp>
+      <p:pic>
+        <p:nvPicPr>
+          <p:cNvPr id="10" name="Image 1" descr="preencoded.png">    </p:cNvPr>
+          <p:cNvPicPr>
+            <a:picLocks noChangeAspect="1"/>
+          </p:cNvPicPr>
+          <p:nvPr/>
+        </p:nvPicPr>
+        <p:blipFill>
+          <a:blip r:embed="rId2"/>
+          <a:stretch>
+            <a:fillRect/>
+          </a:stretch>
+        </p:blipFill>
+        <p:spPr>
+          <a:xfrm>
+            <a:off x="3904488" y="2258568"/>
+            <a:ext cx="420624" cy="420624"/>
+          </a:xfrm>
+          <a:prstGeom prst="rect">
+            <a:avLst/>
+          </a:prstGeom>
+        </p:spPr>
+      </p:pic>
+      <p:sp>
+        <p:nvSpPr>
+          <p:cNvPr id="11" name="Text 7"/>
+          <p:cNvSpPr txBox="1"/>
+          <p:nvPr/>
+        </p:nvSpPr>
+        <p:spPr>
+          <a:xfrm>
+            <a:off x="3657600" y="3154680"/>
+            <a:ext cx="2011680" cy="502920"/>
+          </a:xfrm>
+          <a:prstGeom prst="rect">
+            <a:avLst/>
+          </a:prstGeom>
+          <a:noFill/>
+          <a:ln/>
+        </p:spPr>
+        <p:txBody>
+          <a:bodyPr wrap="square" lIns="0" tIns="0" rIns="0" bIns="0" rtlCol="0" anchor="ctr"/>
+          <a:lstStyle/>
+          <a:p>
+            <a:pPr indent="0" marL="0">
+              <a:buNone/>
+            </a:pPr>
+            <a:r>
+              <a:rPr lang="en-US" sz="2200" b="1" dirty="0">
+                <a:solidFill>
+                  <a:srgbClr val="1F2A30"/>
+                </a:solidFill>
+              </a:rPr>
+              <a:t>A casa, in 3</a:t>
+            </a:r>
+            <a:endParaRPr lang="en-US" sz="2200" dirty="0"/>
+          </a:p>
+        </p:txBody>
+      </p:sp>
+      <p:sp>
+        <p:nvSpPr>
+          <p:cNvPr id="12" name="Text 8"/>
+          <p:cNvSpPr txBox="1"/>
+          <p:nvPr/>
+        </p:nvSpPr>
+        <p:spPr>
+          <a:xfrm>
+            <a:off x="3657600" y="3703320"/>
+            <a:ext cx="2011680" cy="594360"/>
+          </a:xfrm>
+          <a:prstGeom prst="rect">
+            <a:avLst/>
+          </a:prstGeom>
+          <a:noFill/>
+          <a:ln/>
+        </p:spPr>
+        <p:txBody>
+          <a:bodyPr wrap="square" lIns="0" tIns="0" rIns="0" bIns="0" rtlCol="0" anchor="t"/>
+          <a:lstStyle/>
+          <a:p>
+            <a:pPr indent="0" marL="0">
+              <a:buNone/>
+            </a:pPr>
+            <a:r>
+              <a:rPr lang="en-US" sz="1600" dirty="0">
+                <a:solidFill>
+                  <a:srgbClr val="5C6F7B"/>
+                </a:solidFill>
+              </a:rPr>
+              <a:t>fino all'ultimo incontro, con uno sportello</a:t>
+            </a:r>
+            <a:endParaRPr lang="en-US" sz="1600" dirty="0"/>
+          </a:p>
+        </p:txBody>
+      </p:sp>
+      <p:sp>
+        <p:nvSpPr>
+          <p:cNvPr id="13" name="Shape 9"/>
+          <p:cNvSpPr/>
+          <p:nvPr/>
+        </p:nvSpPr>
+        <p:spPr>
+          <a:xfrm>
+            <a:off x="6217920" y="1737360"/>
+            <a:ext cx="2560320" cy="2743200"/>
+          </a:xfrm>
+          <a:prstGeom prst="roundRect">
+            <a:avLst>
+              <a:gd name="adj" fmla="val 4286"/>
+            </a:avLst>
+          </a:prstGeom>
+          <a:solidFill>
+            <a:srgbClr val="EEF3F4"/>
+          </a:solidFill>
+          <a:ln/>
+        </p:spPr>
+      </p:sp>
+      <p:sp>
+        <p:nvSpPr>
+          <p:cNvPr id="14" name="Shape 10"/>
+          <p:cNvSpPr/>
+          <p:nvPr/>
+        </p:nvSpPr>
+        <p:spPr>
+          <a:xfrm>
+            <a:off x="6492240" y="2011680"/>
+            <a:ext cx="914400" cy="914400"/>
+          </a:xfrm>
+          <a:prstGeom prst="ellipse">
+            <a:avLst/>
+          </a:prstGeom>
+          <a:solidFill>
+            <a:srgbClr val="FFFFFF"/>
+          </a:solidFill>
+          <a:ln/>
+        </p:spPr>
+      </p:sp>
+      <p:pic>
+        <p:nvPicPr>
+          <p:cNvPr id="15" name="Image 2" descr="preencoded.png">    </p:cNvPr>
+          <p:cNvPicPr>
+            <a:picLocks noChangeAspect="1"/>
+          </p:cNvPicPr>
+          <p:nvPr/>
+        </p:nvPicPr>
+        <p:blipFill>
+          <a:blip r:embed="rId3"/>
+          <a:stretch>
+            <a:fillRect/>
+          </a:stretch>
+        </p:blipFill>
+        <p:spPr>
+          <a:xfrm>
+            <a:off x="6739128" y="2258568"/>
+            <a:ext cx="420624" cy="420624"/>
+          </a:xfrm>
+          <a:prstGeom prst="rect">
+            <a:avLst/>
+          </a:prstGeom>
+        </p:spPr>
+      </p:pic>
+      <p:sp>
+        <p:nvSpPr>
+          <p:cNvPr id="16" name="Text 11"/>
+          <p:cNvSpPr txBox="1"/>
+          <p:nvPr/>
+        </p:nvSpPr>
+        <p:spPr>
+          <a:xfrm>
+            <a:off x="6492240" y="3154680"/>
+            <a:ext cx="2011680" cy="502920"/>
+          </a:xfrm>
+          <a:prstGeom prst="rect">
+            <a:avLst/>
+          </a:prstGeom>
+          <a:noFill/>
+          <a:ln/>
+        </p:spPr>
+        <p:txBody>
+          <a:bodyPr wrap="square" lIns="0" tIns="0" rIns="0" bIns="0" rtlCol="0" anchor="ctr"/>
+          <a:lstStyle/>
+          <a:p>
+            <a:pPr indent="0" marL="0">
+              <a:buNone/>
+            </a:pPr>
+            <a:r>
+              <a:rPr lang="en-US" sz="2200" b="1" dirty="0">
+                <a:solidFill>
+                  <a:srgbClr val="1F2A30"/>
+                </a:solidFill>
+              </a:rPr>
+              <a:t>Il notebook</a:t>
+            </a:r>
+            <a:endParaRPr lang="en-US" sz="2200" dirty="0"/>
+          </a:p>
+        </p:txBody>
+      </p:sp>
+      <p:sp>
+        <p:nvSpPr>
+          <p:cNvPr id="17" name="Text 12"/>
+          <p:cNvSpPr txBox="1"/>
+          <p:nvPr/>
+        </p:nvSpPr>
+        <p:spPr>
+          <a:xfrm>
+            <a:off x="6492240" y="3703320"/>
+            <a:ext cx="2011680" cy="594360"/>
+          </a:xfrm>
+          <a:prstGeom prst="rect">
+            <a:avLst/>
+          </a:prstGeom>
+          <a:noFill/>
+          <a:ln/>
+        </p:spPr>
+        <p:txBody>
+          <a:bodyPr wrap="square" lIns="0" tIns="0" rIns="0" bIns="0" rtlCol="0" anchor="t"/>
+          <a:lstStyle/>
+          <a:p>
+            <a:pPr indent="0" marL="0">
+              <a:buNone/>
+            </a:pPr>
+            <a:r>
+              <a:rPr lang="en-US" sz="1600" dirty="0">
+                <a:solidFill>
+                  <a:srgbClr val="5C6F7B"/>
+                </a:solidFill>
+              </a:rPr>
+              <a:t>e lo script, che girano da zero</a:t>
+            </a:r>
+            <a:endParaRPr lang="en-US" sz="1600" dirty="0"/>
+          </a:p>
+        </p:txBody>
+      </p:sp>
+      <p:sp>
+        <p:nvSpPr>
+          <p:cNvPr id="18" name="Shape 13"/>
+          <p:cNvSpPr/>
+          <p:nvPr/>
+        </p:nvSpPr>
+        <p:spPr>
+          <a:xfrm>
+            <a:off x="9052560" y="1737360"/>
+            <a:ext cx="2560320" cy="2743200"/>
+          </a:xfrm>
+          <a:prstGeom prst="roundRect">
+            <a:avLst>
+              <a:gd name="adj" fmla="val 4286"/>
+            </a:avLst>
+          </a:prstGeom>
+          <a:solidFill>
+            <a:srgbClr val="EEF3F4"/>
+          </a:solidFill>
+          <a:ln/>
+        </p:spPr>
+      </p:sp>
+      <p:sp>
+        <p:nvSpPr>
+          <p:cNvPr id="19" name="Shape 14"/>
+          <p:cNvSpPr/>
+          <p:nvPr/>
+        </p:nvSpPr>
+        <p:spPr>
+          <a:xfrm>
+            <a:off x="9326880" y="2011680"/>
+            <a:ext cx="914400" cy="914400"/>
+          </a:xfrm>
+          <a:prstGeom prst="ellipse">
+            <a:avLst/>
+          </a:prstGeom>
+          <a:solidFill>
+            <a:srgbClr val="FFFFFF"/>
+          </a:solidFill>
+          <a:ln/>
+        </p:spPr>
+      </p:sp>
+      <p:pic>
+        <p:nvPicPr>
+          <p:cNvPr id="20" name="Image 3" descr="preencoded.png">    </p:cNvPr>
+          <p:cNvPicPr>
+            <a:picLocks noChangeAspect="1"/>
+          </p:cNvPicPr>
+          <p:nvPr/>
+        </p:nvPicPr>
+        <p:blipFill>
+          <a:blip r:embed="rId4"/>
+          <a:stretch>
+            <a:fillRect/>
+          </a:stretch>
+        </p:blipFill>
+        <p:spPr>
+          <a:xfrm>
+            <a:off x="9573768" y="2258568"/>
+            <a:ext cx="420624" cy="420624"/>
+          </a:xfrm>
+          <a:prstGeom prst="rect">
+            <a:avLst/>
+          </a:prstGeom>
+        </p:spPr>
+      </p:pic>
+      <p:sp>
+        <p:nvSpPr>
+          <p:cNvPr id="21" name="Text 15"/>
+          <p:cNvSpPr txBox="1"/>
+          <p:nvPr/>
+        </p:nvSpPr>
+        <p:spPr>
+          <a:xfrm>
+            <a:off x="9326880" y="3154680"/>
+            <a:ext cx="2011680" cy="502920"/>
+          </a:xfrm>
+          <a:prstGeom prst="rect">
+            <a:avLst/>
+          </a:prstGeom>
+          <a:noFill/>
+          <a:ln/>
+        </p:spPr>
+        <p:txBody>
+          <a:bodyPr wrap="square" lIns="0" tIns="0" rIns="0" bIns="0" rtlCol="0" anchor="ctr"/>
+          <a:lstStyle/>
+          <a:p>
+            <a:pPr indent="0" marL="0">
+              <a:buNone/>
+            </a:pPr>
+            <a:r>
+              <a:rPr lang="en-US" sz="2200" b="1" dirty="0">
+                <a:solidFill>
+                  <a:srgbClr val="1F2A30"/>
+                </a:solidFill>
+              </a:rPr>
+              <a:t>10 minuti</a:t>
+            </a:r>
+            <a:endParaRPr lang="en-US" sz="2200" dirty="0"/>
+          </a:p>
+        </p:txBody>
+      </p:sp>
+      <p:sp>
+        <p:nvSpPr>
+          <p:cNvPr id="22" name="Text 16"/>
+          <p:cNvSpPr txBox="1"/>
+          <p:nvPr/>
+        </p:nvSpPr>
+        <p:spPr>
+          <a:xfrm>
+            <a:off x="9326880" y="3703320"/>
+            <a:ext cx="2011680" cy="594360"/>
+          </a:xfrm>
+          <a:prstGeom prst="rect">
+            <a:avLst/>
+          </a:prstGeom>
+          <a:noFill/>
+          <a:ln/>
+        </p:spPr>
+        <p:txBody>
+          <a:bodyPr wrap="square" lIns="0" tIns="0" rIns="0" bIns="0" rtlCol="0" anchor="t"/>
+          <a:lstStyle/>
+          <a:p>
+            <a:pPr indent="0" marL="0">
+              <a:buNone/>
+            </a:pPr>
+            <a:r>
+              <a:rPr lang="en-US" sz="1600" dirty="0">
+                <a:solidFill>
+                  <a:srgbClr val="5C6F7B"/>
+                </a:solidFill>
+              </a:rPr>
+              <a:t>e ognuno sa spiegare tutto</a:t>
+            </a:r>
+            <a:endParaRPr lang="en-US" sz="1600" dirty="0"/>
+          </a:p>
+        </p:txBody>
+      </p:sp>
+      <p:sp>
+        <p:nvSpPr>
+          <p:cNvPr id="23" name="Text 17"/>
+          <p:cNvSpPr txBox="1"/>
+          <p:nvPr/>
+        </p:nvSpPr>
+        <p:spPr>
+          <a:xfrm>
+            <a:off x="548640" y="4846320"/>
+            <a:ext cx="11064240" cy="457200"/>
+          </a:xfrm>
+          <a:prstGeom prst="rect">
+            <a:avLst/>
+          </a:prstGeom>
+          <a:noFill/>
+          <a:ln/>
+        </p:spPr>
+        <p:txBody>
+          <a:bodyPr wrap="square" lIns="0" tIns="0" rIns="0" bIns="0" rtlCol="0" anchor="ctr"/>
+          <a:lstStyle/>
+          <a:p>
+            <a:pPr indent="0" marL="0">
+              <a:buNone/>
+            </a:pPr>
+            <a:r>
+              <a:rPr lang="en-US" sz="1800" i="1" dirty="0">
+                <a:solidFill>
+                  <a:srgbClr val="0F4C5C"/>
+                </a:solidFill>
+              </a:rPr>
+              <a:t>Istruzioni, tappe e criteri: nel notebook dell'E4. Il giorno prima dell'ultimo incontro mandate il link.</a:t>
+            </a:r>
+            <a:endParaRPr lang="en-US" sz="1800" dirty="0"/>
+          </a:p>
+        </p:txBody>
+      </p:sp>
+      <p:sp>
+        <p:nvSpPr>
+          <p:cNvPr id="25" name="Slide Number Placeholder 0"/>
+          <p:cNvSpPr>
+            <a:spLocks noGrp="1"/>
+          </p:cNvSpPr>
+          <p:nvPr>
+            <p:ph type="sldNum" sz="quarter" idx="4294967295"/>
+          </p:nvPr>
+        </p:nvSpPr>
+        <p:spPr>
+          <a:xfrm>
+            <a:off x="11155680" y="6400800"/>
+            <a:ext cx="457200" cy="274320"/>
+          </a:xfrm>
+          <a:prstGeom prst="rect">
+            <a:avLst/>
+          </a:prstGeom>
+          <a:extLst>
+            <a:ext uri="{C572A759-6A51-4108-AA02-DFA0A04FC94B}">
+              <ma14:wrappingTextBoxFlag xmlns:ma14="http://schemas.microsoft.com/office/mac/drawingml/2011/main" val="0"/>
+            </a:ext>
+          </a:extLst>
+        </p:spPr>
+        <p:txBody>
+          <a:bodyPr/>
+          <a:lstStyle>
+            <a:lvl1pPr>
+              <a:defRPr sz="1000">
+                <a:solidFill>
+                  <a:srgbClr val="5C6F7B"/>
+                </a:solidFill>
+              </a:defRPr>
+            </a:lvl1pPr>
+          </a:lstStyle>
+          <a:p>
+            <a:pPr algn="r"/>
+            <a:fld id="{F7021451-1387-4CA6-816F-3879F97B5CBC}" type="slidenum">
+              <a:rPr b="0" lang="en-US"/>
+              <a:t>11</a:t>
+            </a:fld>
+            <a:endParaRPr lang="en-US"/>
+          </a:p>
+        </p:txBody>
+      </p:sp>
+    </p:spTree>
+  </p:cSld>
+  <p:clrMapOvr>
+    <a:masterClrMapping/>
+  </p:clrMapOvr>
+</p:sld>
+</file>
+
+<file path=ppt/slides/slide12.xml><?xml version="1.0" encoding="utf-8"?>
+<p:sld xmlns:a="http://schemas.openxmlformats.org/drawingml/2006/main" xmlns:r="http://schemas.openxmlformats.org/officeDocument/2006/relationships" xmlns:p="http://schemas.openxmlformats.org/presentationml/2006/main">
+  <p:cSld name="Slide 12">
     <p:spTree>
       <p:nvGrpSpPr>
         <p:cNvPr id="1" name=""/>
